--- a/lab1/Лр1_Энтропия.pptx
+++ b/lab1/Лр1_Энтропия.pptx
@@ -5,7 +5,7 @@
     <p:sldMasterId id="2147483648" r:id="rId1"/>
   </p:sldMasterIdLst>
   <p:notesMasterIdLst>
-    <p:notesMasterId r:id="rId26"/>
+    <p:notesMasterId r:id="rId27"/>
   </p:notesMasterIdLst>
   <p:sldIdLst>
     <p:sldId id="256" r:id="rId2"/>
@@ -32,6 +32,7 @@
     <p:sldId id="277" r:id="rId23"/>
     <p:sldId id="278" r:id="rId24"/>
     <p:sldId id="279" r:id="rId25"/>
+    <p:sldId id="280" r:id="rId26"/>
   </p:sldIdLst>
   <p:sldSz cx="12192000" cy="6858000"/>
   <p:notesSz cx="6858000" cy="9144000"/>
@@ -226,7 +227,7 @@
           <a:p>
             <a:fld id="{46D652B2-8C6E-419B-8E93-813F678ADC08}" type="datetimeFigureOut">
               <a:rPr lang="ru-RU" smtClean="0"/>
-              <a:t>19.02.2026</a:t>
+              <a:t>26.02.2026</a:t>
             </a:fld>
             <a:endParaRPr lang="ru-RU"/>
           </a:p>
@@ -488,6 +489,90 @@
 </p:notesMaster>
 </file>
 
+<file path=ppt/notesSlides/notesSlide1.xml><?xml version="1.0" encoding="utf-8"?>
+<p:notes xmlns:a="http://schemas.openxmlformats.org/drawingml/2006/main" xmlns:r="http://schemas.openxmlformats.org/officeDocument/2006/relationships" xmlns:p="http://schemas.openxmlformats.org/presentationml/2006/main">
+  <p:cSld>
+    <p:spTree>
+      <p:nvGrpSpPr>
+        <p:cNvPr id="1" name=""/>
+        <p:cNvGrpSpPr/>
+        <p:nvPr/>
+      </p:nvGrpSpPr>
+      <p:grpSpPr>
+        <a:xfrm>
+          <a:off x="0" y="0"/>
+          <a:ext cx="0" cy="0"/>
+          <a:chOff x="0" y="0"/>
+          <a:chExt cx="0" cy="0"/>
+        </a:xfrm>
+      </p:grpSpPr>
+      <p:sp>
+        <p:nvSpPr>
+          <p:cNvPr id="2" name="Образ слайда 1"/>
+          <p:cNvSpPr>
+            <a:spLocks noGrp="1" noRot="1" noChangeAspect="1"/>
+          </p:cNvSpPr>
+          <p:nvPr>
+            <p:ph type="sldImg"/>
+          </p:nvPr>
+        </p:nvSpPr>
+        <p:spPr/>
+      </p:sp>
+      <p:sp>
+        <p:nvSpPr>
+          <p:cNvPr id="3" name="Заметки 2"/>
+          <p:cNvSpPr>
+            <a:spLocks noGrp="1"/>
+          </p:cNvSpPr>
+          <p:nvPr>
+            <p:ph type="body" idx="1"/>
+          </p:nvPr>
+        </p:nvSpPr>
+        <p:spPr/>
+        <p:txBody>
+          <a:bodyPr/>
+          <a:lstStyle/>
+          <a:p>
+            <a:endParaRPr lang="ru-RU" dirty="0"/>
+          </a:p>
+        </p:txBody>
+      </p:sp>
+      <p:sp>
+        <p:nvSpPr>
+          <p:cNvPr id="4" name="Номер слайда 3"/>
+          <p:cNvSpPr>
+            <a:spLocks noGrp="1"/>
+          </p:cNvSpPr>
+          <p:nvPr>
+            <p:ph type="sldNum" sz="quarter" idx="5"/>
+          </p:nvPr>
+        </p:nvSpPr>
+        <p:spPr/>
+        <p:txBody>
+          <a:bodyPr/>
+          <a:lstStyle/>
+          <a:p>
+            <a:fld id="{C6C6DC3D-C717-495C-B489-C044A339A551}" type="slidenum">
+              <a:rPr lang="ru-RU" smtClean="0"/>
+              <a:t>14</a:t>
+            </a:fld>
+            <a:endParaRPr lang="ru-RU"/>
+          </a:p>
+        </p:txBody>
+      </p:sp>
+    </p:spTree>
+    <p:extLst>
+      <p:ext uri="{BB962C8B-B14F-4D97-AF65-F5344CB8AC3E}">
+        <p14:creationId xmlns:p14="http://schemas.microsoft.com/office/powerpoint/2010/main" val="1829838381"/>
+      </p:ext>
+    </p:extLst>
+  </p:cSld>
+  <p:clrMapOvr>
+    <a:masterClrMapping/>
+  </p:clrMapOvr>
+</p:notes>
+</file>
+
 <file path=ppt/slideLayouts/slideLayout1.xml><?xml version="1.0" encoding="utf-8"?>
 <p:sldLayout xmlns:a="http://schemas.openxmlformats.org/drawingml/2006/main" xmlns:r="http://schemas.openxmlformats.org/officeDocument/2006/relationships" xmlns:p="http://schemas.openxmlformats.org/presentationml/2006/main" type="title" preserve="1">
   <p:cSld name="Титульный слайд">
@@ -617,7 +702,7 @@
           <a:p>
             <a:fld id="{F1443F6D-F931-4A71-A15D-2B264EF1AB73}" type="datetime1">
               <a:rPr lang="ru-RU" smtClean="0"/>
-              <a:t>19.02.2026</a:t>
+              <a:t>26.02.2026</a:t>
             </a:fld>
             <a:endParaRPr lang="ru-RU"/>
           </a:p>
@@ -780,7 +865,7 @@
           <a:p>
             <a:fld id="{28DF3D71-8A8E-4DBA-8033-AAB5462B6CE0}" type="datetime1">
               <a:rPr lang="ru-RU" smtClean="0"/>
-              <a:t>19.02.2026</a:t>
+              <a:t>26.02.2026</a:t>
             </a:fld>
             <a:endParaRPr lang="ru-RU"/>
           </a:p>
@@ -953,7 +1038,7 @@
           <a:p>
             <a:fld id="{C00B3D6A-3CF2-4553-BAC0-BB06B6F47902}" type="datetime1">
               <a:rPr lang="ru-RU" smtClean="0"/>
-              <a:t>19.02.2026</a:t>
+              <a:t>26.02.2026</a:t>
             </a:fld>
             <a:endParaRPr lang="ru-RU"/>
           </a:p>
@@ -1116,7 +1201,7 @@
           <a:p>
             <a:fld id="{5A5362CE-C055-49FC-B546-755736F22EB5}" type="datetime1">
               <a:rPr lang="ru-RU" smtClean="0"/>
-              <a:t>19.02.2026</a:t>
+              <a:t>26.02.2026</a:t>
             </a:fld>
             <a:endParaRPr lang="ru-RU"/>
           </a:p>
@@ -1356,7 +1441,7 @@
           <a:p>
             <a:fld id="{3554ACE1-21D3-431B-BB16-11F730503F41}" type="datetime1">
               <a:rPr lang="ru-RU" smtClean="0"/>
-              <a:t>19.02.2026</a:t>
+              <a:t>26.02.2026</a:t>
             </a:fld>
             <a:endParaRPr lang="ru-RU"/>
           </a:p>
@@ -1580,7 +1665,7 @@
           <a:p>
             <a:fld id="{10390E54-7C12-4AA1-97C8-2D329171C2CD}" type="datetime1">
               <a:rPr lang="ru-RU" smtClean="0"/>
-              <a:t>19.02.2026</a:t>
+              <a:t>26.02.2026</a:t>
             </a:fld>
             <a:endParaRPr lang="ru-RU"/>
           </a:p>
@@ -1939,7 +2024,7 @@
           <a:p>
             <a:fld id="{BB9BD5FB-95D5-46AF-A9FF-68F9AE7921F6}" type="datetime1">
               <a:rPr lang="ru-RU" smtClean="0"/>
-              <a:t>19.02.2026</a:t>
+              <a:t>26.02.2026</a:t>
             </a:fld>
             <a:endParaRPr lang="ru-RU"/>
           </a:p>
@@ -2051,7 +2136,7 @@
           <a:p>
             <a:fld id="{35A050D7-52F7-4420-ADAD-F5D78D8B0ECD}" type="datetime1">
               <a:rPr lang="ru-RU" smtClean="0"/>
-              <a:t>19.02.2026</a:t>
+              <a:t>26.02.2026</a:t>
             </a:fld>
             <a:endParaRPr lang="ru-RU"/>
           </a:p>
@@ -2141,7 +2226,7 @@
           <a:p>
             <a:fld id="{951B76D4-D711-4CA3-BAFD-0106F3401A9A}" type="datetime1">
               <a:rPr lang="ru-RU" smtClean="0"/>
-              <a:t>19.02.2026</a:t>
+              <a:t>26.02.2026</a:t>
             </a:fld>
             <a:endParaRPr lang="ru-RU"/>
           </a:p>
@@ -2411,7 +2496,7 @@
           <a:p>
             <a:fld id="{C79B8C9D-6602-42BD-B402-30C2B4239D8F}" type="datetime1">
               <a:rPr lang="ru-RU" smtClean="0"/>
-              <a:t>19.02.2026</a:t>
+              <a:t>26.02.2026</a:t>
             </a:fld>
             <a:endParaRPr lang="ru-RU"/>
           </a:p>
@@ -2661,7 +2746,7 @@
           <a:p>
             <a:fld id="{AAB8DE63-C279-41BA-9104-D9533059161D}" type="datetime1">
               <a:rPr lang="ru-RU" smtClean="0"/>
-              <a:t>19.02.2026</a:t>
+              <a:t>26.02.2026</a:t>
             </a:fld>
             <a:endParaRPr lang="ru-RU"/>
           </a:p>
@@ -2876,7 +2961,7 @@
           <a:p>
             <a:fld id="{33AAF765-F399-45DB-B93D-F8E5B81DD6F0}" type="datetime1">
               <a:rPr lang="ru-RU" smtClean="0"/>
-              <a:t>19.02.2026</a:t>
+              <a:t>26.02.2026</a:t>
             </a:fld>
             <a:endParaRPr lang="ru-RU"/>
           </a:p>
@@ -3503,8 +3588,8 @@
         </p:nvSpPr>
         <p:spPr>
           <a:xfrm>
-            <a:off x="1112864" y="5966766"/>
-            <a:ext cx="3726991" cy="369332"/>
+            <a:off x="518332" y="5987018"/>
+            <a:ext cx="4792636" cy="369332"/>
           </a:xfrm>
           <a:prstGeom prst="rect">
             <a:avLst/>
@@ -3525,6 +3610,17 @@
               </a:rPr>
               <a:t>Рис. 14 – Шестнадцатеричный дамп</a:t>
             </a:r>
+            <a:r>
+              <a:rPr lang="en-US" dirty="0">
+                <a:latin typeface="Times New Roman" panose="02020603050405020304" pitchFamily="18" charset="0"/>
+                <a:cs typeface="Times New Roman" panose="02020603050405020304" pitchFamily="18" charset="0"/>
+              </a:rPr>
+              <a:t> (Python)</a:t>
+            </a:r>
+            <a:endParaRPr lang="ru-RU" dirty="0">
+              <a:latin typeface="Times New Roman" panose="02020603050405020304" pitchFamily="18" charset="0"/>
+              <a:cs typeface="Times New Roman" panose="02020603050405020304" pitchFamily="18" charset="0"/>
+            </a:endParaRPr>
           </a:p>
         </p:txBody>
       </p:sp>
@@ -3537,7 +3633,7 @@
         <p:spPr>
           <a:xfrm>
             <a:off x="6770216" y="5782100"/>
-            <a:ext cx="4507384" cy="369332"/>
+            <a:ext cx="4507384" cy="646331"/>
           </a:xfrm>
           <a:prstGeom prst="rect">
             <a:avLst/>
@@ -3550,12 +3646,41 @@
           </a:bodyPr>
           <a:lstStyle/>
           <a:p>
-            <a:r>
-              <a:rPr lang="ru-RU" dirty="0">
-                <a:latin typeface="Times New Roman" panose="02020603050405020304" pitchFamily="18" charset="0"/>
-                <a:cs typeface="Times New Roman" panose="02020603050405020304" pitchFamily="18" charset="0"/>
-              </a:rPr>
-              <a:t>Рис. 15 – Дизассемблирование программы </a:t>
+            <a:pPr algn="ctr"/>
+            <a:r>
+              <a:rPr lang="ru-RU" dirty="0">
+                <a:latin typeface="Times New Roman" panose="02020603050405020304" pitchFamily="18" charset="0"/>
+                <a:cs typeface="Times New Roman" panose="02020603050405020304" pitchFamily="18" charset="0"/>
+              </a:rPr>
+              <a:t>Рис. 15 – Дизассемблирование программы</a:t>
+            </a:r>
+            <a:r>
+              <a:rPr lang="en-US" dirty="0">
+                <a:latin typeface="Times New Roman" panose="02020603050405020304" pitchFamily="18" charset="0"/>
+                <a:cs typeface="Times New Roman" panose="02020603050405020304" pitchFamily="18" charset="0"/>
+              </a:rPr>
+              <a:t> </a:t>
+            </a:r>
+            <a:r>
+              <a:rPr lang="ru-RU" dirty="0">
+                <a:latin typeface="Times New Roman" panose="02020603050405020304" pitchFamily="18" charset="0"/>
+                <a:cs typeface="Times New Roman" panose="02020603050405020304" pitchFamily="18" charset="0"/>
+              </a:rPr>
+              <a:t>на ЯП </a:t>
+            </a:r>
+            <a:r>
+              <a:rPr lang="en-US" dirty="0">
+                <a:latin typeface="Times New Roman" panose="02020603050405020304" pitchFamily="18" charset="0"/>
+                <a:cs typeface="Times New Roman" panose="02020603050405020304" pitchFamily="18" charset="0"/>
+              </a:rPr>
+              <a:t>Python</a:t>
+            </a:r>
+            <a:r>
+              <a:rPr lang="ru-RU" dirty="0">
+                <a:latin typeface="Times New Roman" panose="02020603050405020304" pitchFamily="18" charset="0"/>
+                <a:cs typeface="Times New Roman" panose="02020603050405020304" pitchFamily="18" charset="0"/>
+              </a:rPr>
+              <a:t> </a:t>
             </a:r>
           </a:p>
         </p:txBody>
@@ -3671,7 +3796,7 @@
         <p:spPr>
           <a:xfrm>
             <a:off x="5054688" y="3000646"/>
-            <a:ext cx="2082621" cy="369332"/>
+            <a:ext cx="2944652" cy="369332"/>
           </a:xfrm>
           <a:prstGeom prst="rect">
             <a:avLst/>
@@ -3691,6 +3816,17 @@
               </a:rPr>
               <a:t>Рис. 16 – Энтропия</a:t>
             </a:r>
+            <a:r>
+              <a:rPr lang="en-US" dirty="0">
+                <a:latin typeface="Times New Roman" panose="02020603050405020304" pitchFamily="18" charset="0"/>
+                <a:cs typeface="Times New Roman" panose="02020603050405020304" pitchFamily="18" charset="0"/>
+              </a:rPr>
+              <a:t> (Python)</a:t>
+            </a:r>
+            <a:endParaRPr lang="ru-RU" dirty="0">
+              <a:latin typeface="Times New Roman" panose="02020603050405020304" pitchFamily="18" charset="0"/>
+              <a:cs typeface="Times New Roman" panose="02020603050405020304" pitchFamily="18" charset="0"/>
+            </a:endParaRPr>
           </a:p>
         </p:txBody>
       </p:sp>
@@ -3703,7 +3839,7 @@
         <p:spPr>
           <a:xfrm>
             <a:off x="4152389" y="6314347"/>
-            <a:ext cx="3887218" cy="369332"/>
+            <a:ext cx="4757649" cy="369332"/>
           </a:xfrm>
           <a:prstGeom prst="rect">
             <a:avLst/>
@@ -3723,6 +3859,17 @@
               </a:rPr>
               <a:t>Рис. 17 – Гистограмма распределения</a:t>
             </a:r>
+            <a:r>
+              <a:rPr lang="en-US" dirty="0">
+                <a:latin typeface="Times New Roman" panose="02020603050405020304" pitchFamily="18" charset="0"/>
+                <a:cs typeface="Times New Roman" panose="02020603050405020304" pitchFamily="18" charset="0"/>
+              </a:rPr>
+              <a:t> (Python)</a:t>
+            </a:r>
+            <a:endParaRPr lang="ru-RU" dirty="0">
+              <a:latin typeface="Times New Roman" panose="02020603050405020304" pitchFamily="18" charset="0"/>
+              <a:cs typeface="Times New Roman" panose="02020603050405020304" pitchFamily="18" charset="0"/>
+            </a:endParaRPr>
           </a:p>
         </p:txBody>
       </p:sp>
@@ -3830,7 +3977,7 @@
         <p:spPr>
           <a:xfrm>
             <a:off x="781485" y="5936312"/>
-            <a:ext cx="2842241" cy="646331"/>
+            <a:ext cx="2842241" cy="923330"/>
           </a:xfrm>
           <a:prstGeom prst="rect">
             <a:avLst/>
@@ -3843,6 +3990,7 @@
           </a:bodyPr>
           <a:lstStyle/>
           <a:p>
+            <a:pPr algn="ctr"/>
             <a:r>
               <a:rPr lang="ru-RU" dirty="0">
                 <a:latin typeface="Times New Roman" panose="02020603050405020304" pitchFamily="18" charset="0"/>
@@ -3855,7 +4003,7 @@
                 <a:latin typeface="Times New Roman" panose="02020603050405020304" pitchFamily="18" charset="0"/>
                 <a:cs typeface="Times New Roman" panose="02020603050405020304" pitchFamily="18" charset="0"/>
               </a:rPr>
-              <a:t>test1</a:t>
+              <a:t>test1 (C++)</a:t>
             </a:r>
             <a:endParaRPr lang="ru-RU" dirty="0">
               <a:latin typeface="Times New Roman" panose="02020603050405020304" pitchFamily="18" charset="0"/>
@@ -3920,8 +4068,8 @@
         </p:nvSpPr>
         <p:spPr>
           <a:xfrm>
-            <a:off x="5626888" y="3429000"/>
-            <a:ext cx="5332012" cy="369332"/>
+            <a:off x="5269392" y="3429000"/>
+            <a:ext cx="5964890" cy="369332"/>
           </a:xfrm>
           <a:prstGeom prst="rect">
             <a:avLst/>
@@ -3941,6 +4089,31 @@
               </a:rPr>
               <a:t>Рис. 19 – Гистограмма распределения</a:t>
             </a:r>
+            <a:r>
+              <a:rPr lang="en-US" dirty="0">
+                <a:latin typeface="Times New Roman" panose="02020603050405020304" pitchFamily="18" charset="0"/>
+                <a:cs typeface="Times New Roman" panose="02020603050405020304" pitchFamily="18" charset="0"/>
+              </a:rPr>
+              <a:t> (</a:t>
+            </a:r>
+            <a:r>
+              <a:rPr lang="ru-RU" dirty="0">
+                <a:latin typeface="Times New Roman" panose="02020603050405020304" pitchFamily="18" charset="0"/>
+                <a:cs typeface="Times New Roman" panose="02020603050405020304" pitchFamily="18" charset="0"/>
+              </a:rPr>
+              <a:t>упакованный </a:t>
+            </a:r>
+            <a:r>
+              <a:rPr lang="en-US" dirty="0">
+                <a:latin typeface="Times New Roman" panose="02020603050405020304" pitchFamily="18" charset="0"/>
+                <a:cs typeface="Times New Roman" panose="02020603050405020304" pitchFamily="18" charset="0"/>
+              </a:rPr>
+              <a:t>C++)</a:t>
+            </a:r>
+            <a:endParaRPr lang="ru-RU" dirty="0">
+              <a:latin typeface="Times New Roman" panose="02020603050405020304" pitchFamily="18" charset="0"/>
+              <a:cs typeface="Times New Roman" panose="02020603050405020304" pitchFamily="18" charset="0"/>
+            </a:endParaRPr>
           </a:p>
         </p:txBody>
       </p:sp>
@@ -3952,7 +4125,7 @@
         </p:nvSpPr>
         <p:spPr>
           <a:xfrm>
-            <a:off x="5902270" y="6332289"/>
+            <a:off x="5285142" y="6346357"/>
             <a:ext cx="5332012" cy="369332"/>
           </a:xfrm>
           <a:prstGeom prst="rect">
@@ -3971,8 +4144,33 @@
                 <a:latin typeface="Times New Roman" panose="02020603050405020304" pitchFamily="18" charset="0"/>
                 <a:cs typeface="Times New Roman" panose="02020603050405020304" pitchFamily="18" charset="0"/>
               </a:rPr>
-              <a:t>Рис. 20 – Гистограмма энтропия</a:t>
-            </a:r>
+              <a:t>Рис. 20 – Гистограмма энтропия </a:t>
+            </a:r>
+            <a:r>
+              <a:rPr lang="en-US" dirty="0">
+                <a:latin typeface="Times New Roman" panose="02020603050405020304" pitchFamily="18" charset="0"/>
+                <a:cs typeface="Times New Roman" panose="02020603050405020304" pitchFamily="18" charset="0"/>
+              </a:rPr>
+              <a:t>(</a:t>
+            </a:r>
+            <a:r>
+              <a:rPr lang="ru-RU" dirty="0">
+                <a:latin typeface="Times New Roman" panose="02020603050405020304" pitchFamily="18" charset="0"/>
+                <a:cs typeface="Times New Roman" panose="02020603050405020304" pitchFamily="18" charset="0"/>
+              </a:rPr>
+              <a:t>упакованный </a:t>
+            </a:r>
+            <a:r>
+              <a:rPr lang="en-US" dirty="0">
+                <a:latin typeface="Times New Roman" panose="02020603050405020304" pitchFamily="18" charset="0"/>
+                <a:cs typeface="Times New Roman" panose="02020603050405020304" pitchFamily="18" charset="0"/>
+              </a:rPr>
+              <a:t>C++)</a:t>
+            </a:r>
+            <a:endParaRPr lang="ru-RU" dirty="0">
+              <a:latin typeface="Times New Roman" panose="02020603050405020304" pitchFamily="18" charset="0"/>
+              <a:cs typeface="Times New Roman" panose="02020603050405020304" pitchFamily="18" charset="0"/>
+            </a:endParaRPr>
           </a:p>
         </p:txBody>
       </p:sp>
@@ -4001,7 +4199,7 @@
               <a:rPr lang="ru-RU" smtClean="0"/>
               <a:t>12</a:t>
             </a:fld>
-            <a:endParaRPr lang="ru-RU"/>
+            <a:endParaRPr lang="ru-RU" dirty="0"/>
           </a:p>
         </p:txBody>
       </p:sp>
@@ -4079,7 +4277,7 @@
         </p:nvSpPr>
         <p:spPr>
           <a:xfrm>
-            <a:off x="935379" y="6031717"/>
+            <a:off x="419408" y="6033184"/>
             <a:ext cx="3707284" cy="646331"/>
           </a:xfrm>
           <a:prstGeom prst="rect">
@@ -4093,6 +4291,7 @@
           </a:bodyPr>
           <a:lstStyle/>
           <a:p>
+            <a:pPr algn="ctr"/>
             <a:r>
               <a:rPr lang="ru-RU" dirty="0">
                 <a:latin typeface="Times New Roman" panose="02020603050405020304" pitchFamily="18" charset="0"/>
@@ -4107,10 +4306,27 @@
               </a:rPr>
               <a:t>test2</a:t>
             </a:r>
-            <a:endParaRPr lang="ru-RU" dirty="0">
-              <a:latin typeface="Times New Roman" panose="02020603050405020304" pitchFamily="18" charset="0"/>
-              <a:cs typeface="Times New Roman" panose="02020603050405020304" pitchFamily="18" charset="0"/>
-            </a:endParaRPr>
+            <a:r>
+              <a:rPr lang="ru-RU" dirty="0">
+                <a:latin typeface="Times New Roman" panose="02020603050405020304" pitchFamily="18" charset="0"/>
+                <a:cs typeface="Times New Roman" panose="02020603050405020304" pitchFamily="18" charset="0"/>
+              </a:rPr>
+              <a:t> (</a:t>
+            </a:r>
+            <a:r>
+              <a:rPr lang="en-US" dirty="0">
+                <a:latin typeface="Times New Roman" panose="02020603050405020304" pitchFamily="18" charset="0"/>
+                <a:cs typeface="Times New Roman" panose="02020603050405020304" pitchFamily="18" charset="0"/>
+              </a:rPr>
+              <a:t>C#</a:t>
+            </a:r>
+            <a:r>
+              <a:rPr lang="ru-RU" dirty="0">
+                <a:latin typeface="Times New Roman" panose="02020603050405020304" pitchFamily="18" charset="0"/>
+                <a:cs typeface="Times New Roman" panose="02020603050405020304" pitchFamily="18" charset="0"/>
+              </a:rPr>
+              <a:t>)</a:t>
+            </a:r>
           </a:p>
         </p:txBody>
       </p:sp>
@@ -4170,8 +4386,8 @@
         </p:nvSpPr>
         <p:spPr>
           <a:xfrm>
-            <a:off x="5714082" y="3429000"/>
-            <a:ext cx="4215010" cy="369332"/>
+            <a:off x="5238125" y="3397146"/>
+            <a:ext cx="6116847" cy="369332"/>
           </a:xfrm>
           <a:prstGeom prst="rect">
             <a:avLst/>
@@ -4205,6 +4421,31 @@
               </a:rPr>
               <a:t> – Гистограмма распределения</a:t>
             </a:r>
+            <a:r>
+              <a:rPr lang="en-US" dirty="0">
+                <a:latin typeface="Times New Roman" panose="02020603050405020304" pitchFamily="18" charset="0"/>
+                <a:cs typeface="Times New Roman" panose="02020603050405020304" pitchFamily="18" charset="0"/>
+              </a:rPr>
+              <a:t> (</a:t>
+            </a:r>
+            <a:r>
+              <a:rPr lang="ru-RU" dirty="0">
+                <a:latin typeface="Times New Roman" panose="02020603050405020304" pitchFamily="18" charset="0"/>
+                <a:cs typeface="Times New Roman" panose="02020603050405020304" pitchFamily="18" charset="0"/>
+              </a:rPr>
+              <a:t>упакованный </a:t>
+            </a:r>
+            <a:r>
+              <a:rPr lang="en-US" dirty="0">
+                <a:latin typeface="Times New Roman" panose="02020603050405020304" pitchFamily="18" charset="0"/>
+                <a:cs typeface="Times New Roman" panose="02020603050405020304" pitchFamily="18" charset="0"/>
+              </a:rPr>
+              <a:t>C#)</a:t>
+            </a:r>
+            <a:endParaRPr lang="ru-RU" dirty="0">
+              <a:latin typeface="Times New Roman" panose="02020603050405020304" pitchFamily="18" charset="0"/>
+              <a:cs typeface="Times New Roman" panose="02020603050405020304" pitchFamily="18" charset="0"/>
+            </a:endParaRPr>
           </a:p>
         </p:txBody>
       </p:sp>
@@ -4216,8 +4457,8 @@
         </p:nvSpPr>
         <p:spPr>
           <a:xfrm>
-            <a:off x="6846091" y="6400668"/>
-            <a:ext cx="2188704" cy="369332"/>
+            <a:off x="5968528" y="6376700"/>
+            <a:ext cx="3943829" cy="369332"/>
           </a:xfrm>
           <a:prstGeom prst="rect">
             <a:avLst/>
@@ -4251,6 +4492,31 @@
               </a:rPr>
               <a:t> – Энтропия</a:t>
             </a:r>
+            <a:r>
+              <a:rPr lang="en-US" dirty="0">
+                <a:latin typeface="Times New Roman" panose="02020603050405020304" pitchFamily="18" charset="0"/>
+                <a:cs typeface="Times New Roman" panose="02020603050405020304" pitchFamily="18" charset="0"/>
+              </a:rPr>
+              <a:t> (</a:t>
+            </a:r>
+            <a:r>
+              <a:rPr lang="ru-RU" dirty="0">
+                <a:latin typeface="Times New Roman" panose="02020603050405020304" pitchFamily="18" charset="0"/>
+                <a:cs typeface="Times New Roman" panose="02020603050405020304" pitchFamily="18" charset="0"/>
+              </a:rPr>
+              <a:t>упакованный </a:t>
+            </a:r>
+            <a:r>
+              <a:rPr lang="en-US" dirty="0">
+                <a:latin typeface="Times New Roman" panose="02020603050405020304" pitchFamily="18" charset="0"/>
+                <a:cs typeface="Times New Roman" panose="02020603050405020304" pitchFamily="18" charset="0"/>
+              </a:rPr>
+              <a:t>C#)</a:t>
+            </a:r>
+            <a:endParaRPr lang="ru-RU" dirty="0">
+              <a:latin typeface="Times New Roman" panose="02020603050405020304" pitchFamily="18" charset="0"/>
+              <a:cs typeface="Times New Roman" panose="02020603050405020304" pitchFamily="18" charset="0"/>
+            </a:endParaRPr>
           </a:p>
         </p:txBody>
       </p:sp>
@@ -4317,7 +4583,7 @@
           <p:nvPr/>
         </p:nvPicPr>
         <p:blipFill>
-          <a:blip r:embed="rId2">
+          <a:blip r:embed="rId3">
             <a:extLst>
               <a:ext uri="{28A0092B-C50C-407E-A947-70E740481C1C}">
                 <a14:useLocalDpi xmlns:a14="http://schemas.microsoft.com/office/drawing/2010/main" val="0"/>
@@ -4357,8 +4623,8 @@
         </p:nvSpPr>
         <p:spPr>
           <a:xfrm>
-            <a:off x="617251" y="6134966"/>
-            <a:ext cx="2745222" cy="646331"/>
+            <a:off x="240021" y="6152968"/>
+            <a:ext cx="3622240" cy="646331"/>
           </a:xfrm>
           <a:prstGeom prst="rect">
             <a:avLst/>
@@ -4371,6 +4637,7 @@
           </a:bodyPr>
           <a:lstStyle/>
           <a:p>
+            <a:pPr algn="ctr"/>
             <a:r>
               <a:rPr lang="ru-RU" dirty="0">
                 <a:latin typeface="Times New Roman" panose="02020603050405020304" pitchFamily="18" charset="0"/>
@@ -4383,7 +4650,7 @@
                 <a:latin typeface="Times New Roman" panose="02020603050405020304" pitchFamily="18" charset="0"/>
                 <a:cs typeface="Times New Roman" panose="02020603050405020304" pitchFamily="18" charset="0"/>
               </a:rPr>
-              <a:t>test3</a:t>
+              <a:t>test3 (Python)</a:t>
             </a:r>
             <a:endParaRPr lang="ru-RU" dirty="0">
               <a:latin typeface="Times New Roman" panose="02020603050405020304" pitchFamily="18" charset="0"/>
@@ -4401,7 +4668,7 @@
           <p:nvPr/>
         </p:nvPicPr>
         <p:blipFill>
-          <a:blip r:embed="rId3"/>
+          <a:blip r:embed="rId4"/>
           <a:stretch>
             <a:fillRect/>
           </a:stretch>
@@ -4425,7 +4692,7 @@
           <p:nvPr/>
         </p:nvPicPr>
         <p:blipFill>
-          <a:blip r:embed="rId4"/>
+          <a:blip r:embed="rId5"/>
           <a:stretch>
             <a:fillRect/>
           </a:stretch>
@@ -4448,8 +4715,8 @@
         </p:nvSpPr>
         <p:spPr>
           <a:xfrm>
-            <a:off x="6016958" y="3505103"/>
-            <a:ext cx="4064000" cy="369332"/>
+            <a:off x="5178758" y="3505103"/>
+            <a:ext cx="6175042" cy="369332"/>
           </a:xfrm>
           <a:prstGeom prst="rect">
             <a:avLst/>
@@ -4469,6 +4736,31 @@
               </a:rPr>
               <a:t>Рис. 24 – Гистограмма распределения</a:t>
             </a:r>
+            <a:r>
+              <a:rPr lang="en-US" dirty="0">
+                <a:latin typeface="Times New Roman" panose="02020603050405020304" pitchFamily="18" charset="0"/>
+                <a:cs typeface="Times New Roman" panose="02020603050405020304" pitchFamily="18" charset="0"/>
+              </a:rPr>
+              <a:t> (</a:t>
+            </a:r>
+            <a:r>
+              <a:rPr lang="ru-RU" dirty="0">
+                <a:latin typeface="Times New Roman" panose="02020603050405020304" pitchFamily="18" charset="0"/>
+                <a:cs typeface="Times New Roman" panose="02020603050405020304" pitchFamily="18" charset="0"/>
+              </a:rPr>
+              <a:t>упакованный </a:t>
+            </a:r>
+            <a:r>
+              <a:rPr lang="en-US" dirty="0">
+                <a:latin typeface="Times New Roman" panose="02020603050405020304" pitchFamily="18" charset="0"/>
+                <a:cs typeface="Times New Roman" panose="02020603050405020304" pitchFamily="18" charset="0"/>
+              </a:rPr>
+              <a:t>Python)</a:t>
+            </a:r>
+            <a:endParaRPr lang="ru-RU" dirty="0">
+              <a:latin typeface="Times New Roman" panose="02020603050405020304" pitchFamily="18" charset="0"/>
+              <a:cs typeface="Times New Roman" panose="02020603050405020304" pitchFamily="18" charset="0"/>
+            </a:endParaRPr>
           </a:p>
         </p:txBody>
       </p:sp>
@@ -4480,8 +4772,8 @@
         </p:nvSpPr>
         <p:spPr>
           <a:xfrm>
-            <a:off x="6993353" y="6411965"/>
-            <a:ext cx="2111211" cy="369332"/>
+            <a:off x="6096000" y="6429967"/>
+            <a:ext cx="4865074" cy="369332"/>
           </a:xfrm>
           <a:prstGeom prst="rect">
             <a:avLst/>
@@ -4501,6 +4793,31 @@
               </a:rPr>
               <a:t>Рис. 25 – Энтропия</a:t>
             </a:r>
+            <a:r>
+              <a:rPr lang="en-US" dirty="0">
+                <a:latin typeface="Times New Roman" panose="02020603050405020304" pitchFamily="18" charset="0"/>
+                <a:cs typeface="Times New Roman" panose="02020603050405020304" pitchFamily="18" charset="0"/>
+              </a:rPr>
+              <a:t> (</a:t>
+            </a:r>
+            <a:r>
+              <a:rPr lang="ru-RU" dirty="0">
+                <a:latin typeface="Times New Roman" panose="02020603050405020304" pitchFamily="18" charset="0"/>
+                <a:cs typeface="Times New Roman" panose="02020603050405020304" pitchFamily="18" charset="0"/>
+              </a:rPr>
+              <a:t>упакованный </a:t>
+            </a:r>
+            <a:r>
+              <a:rPr lang="en-US" dirty="0">
+                <a:latin typeface="Times New Roman" panose="02020603050405020304" pitchFamily="18" charset="0"/>
+                <a:cs typeface="Times New Roman" panose="02020603050405020304" pitchFamily="18" charset="0"/>
+              </a:rPr>
+              <a:t>Python)</a:t>
+            </a:r>
+            <a:endParaRPr lang="ru-RU" dirty="0">
+              <a:latin typeface="Times New Roman" panose="02020603050405020304" pitchFamily="18" charset="0"/>
+              <a:cs typeface="Times New Roman" panose="02020603050405020304" pitchFamily="18" charset="0"/>
+            </a:endParaRPr>
           </a:p>
         </p:txBody>
       </p:sp>
@@ -4529,7 +4846,7 @@
               <a:rPr lang="ru-RU" smtClean="0"/>
               <a:t>14</a:t>
             </a:fld>
-            <a:endParaRPr lang="ru-RU"/>
+            <a:endParaRPr lang="ru-RU" dirty="0"/>
           </a:p>
         </p:txBody>
       </p:sp>
@@ -7965,8 +8282,8 @@
         </p:nvSpPr>
         <p:spPr>
           <a:xfrm>
-            <a:off x="281940" y="649605"/>
-            <a:ext cx="11628120" cy="6340197"/>
+            <a:off x="281940" y="444936"/>
+            <a:ext cx="11628120" cy="6093976"/>
           </a:xfrm>
           <a:prstGeom prst="rect">
             <a:avLst/>
@@ -7980,16 +8297,27 @@
           <a:lstStyle/>
           <a:p>
             <a:r>
-              <a:rPr lang="ru-RU" altLang="ru-RU" sz="1400" dirty="0">
+              <a:rPr lang="ru-RU" altLang="ru-RU" sz="2400" b="1" dirty="0">
                 <a:latin typeface="Times New Roman" panose="02020603050405020304" pitchFamily="18" charset="0"/>
                 <a:cs typeface="Times New Roman" panose="02020603050405020304" pitchFamily="18" charset="0"/>
               </a:rPr>
               <a:t>Вывод:</a:t>
             </a:r>
-          </a:p>
-          <a:p>
-            <a:r>
-              <a:rPr lang="ru-RU" altLang="ru-RU" sz="1400" dirty="0">
+            <a:endParaRPr lang="en-US" altLang="ru-RU" sz="2400" b="1" dirty="0">
+              <a:latin typeface="Times New Roman" panose="02020603050405020304" pitchFamily="18" charset="0"/>
+              <a:cs typeface="Times New Roman" panose="02020603050405020304" pitchFamily="18" charset="0"/>
+            </a:endParaRPr>
+          </a:p>
+          <a:p>
+            <a:endParaRPr lang="ru-RU" altLang="ru-RU" sz="2400" b="1" dirty="0">
+              <a:latin typeface="Times New Roman" panose="02020603050405020304" pitchFamily="18" charset="0"/>
+              <a:cs typeface="Times New Roman" panose="02020603050405020304" pitchFamily="18" charset="0"/>
+            </a:endParaRPr>
+          </a:p>
+          <a:p>
+            <a:pPr algn="just"/>
+            <a:r>
+              <a:rPr lang="ru-RU" altLang="ru-RU" dirty="0">
                 <a:latin typeface="Times New Roman" panose="02020603050405020304" pitchFamily="18" charset="0"/>
                 <a:cs typeface="Times New Roman" panose="02020603050405020304" pitchFamily="18" charset="0"/>
               </a:rPr>
@@ -7997,12 +8325,12 @@
             </a:r>
           </a:p>
           <a:p>
-            <a:pPr marL="285750" indent="-285750">
+            <a:pPr marL="285750" indent="-285750" algn="just">
               <a:buFont typeface="Arial" panose="020B0604020202020204" pitchFamily="34" charset="0"/>
               <a:buChar char="•"/>
             </a:pPr>
             <a:r>
-              <a:rPr lang="ru-RU" altLang="ru-RU" sz="1400" dirty="0">
+              <a:rPr lang="ru-RU" altLang="ru-RU" dirty="0">
                 <a:latin typeface="Times New Roman" panose="02020603050405020304" pitchFamily="18" charset="0"/>
                 <a:cs typeface="Times New Roman" panose="02020603050405020304" pitchFamily="18" charset="0"/>
               </a:rPr>
@@ -8010,26 +8338,26 @@
             </a:r>
           </a:p>
           <a:p>
-            <a:pPr marL="285750" indent="-285750">
+            <a:pPr marL="285750" indent="-285750" algn="just">
               <a:buFont typeface="Arial" panose="020B0604020202020204" pitchFamily="34" charset="0"/>
               <a:buChar char="•"/>
             </a:pPr>
             <a:r>
-              <a:rPr lang="ru-RU" altLang="ru-RU" sz="1400" dirty="0">
+              <a:rPr lang="ru-RU" altLang="ru-RU" dirty="0">
                 <a:latin typeface="Times New Roman" panose="02020603050405020304" pitchFamily="18" charset="0"/>
                 <a:cs typeface="Times New Roman" panose="02020603050405020304" pitchFamily="18" charset="0"/>
               </a:rPr>
               <a:t>Исходный код на </a:t>
             </a:r>
             <a:r>
-              <a:rPr lang="ru-RU" altLang="ru-RU" sz="1400" dirty="0" err="1">
+              <a:rPr lang="ru-RU" altLang="ru-RU" dirty="0" err="1">
                 <a:latin typeface="Times New Roman" panose="02020603050405020304" pitchFamily="18" charset="0"/>
                 <a:cs typeface="Times New Roman" panose="02020603050405020304" pitchFamily="18" charset="0"/>
               </a:rPr>
               <a:t>Python</a:t>
             </a:r>
             <a:r>
-              <a:rPr lang="ru-RU" altLang="ru-RU" sz="1400" dirty="0">
+              <a:rPr lang="ru-RU" altLang="ru-RU" dirty="0">
                 <a:latin typeface="Times New Roman" panose="02020603050405020304" pitchFamily="18" charset="0"/>
                 <a:cs typeface="Times New Roman" panose="02020603050405020304" pitchFamily="18" charset="0"/>
               </a:rPr>
@@ -8037,8 +8365,9 @@
             </a:r>
           </a:p>
           <a:p>
-            <a:r>
-              <a:rPr lang="ru-RU" altLang="ru-RU" sz="1400" dirty="0">
+            <a:pPr algn="just"/>
+            <a:r>
+              <a:rPr lang="ru-RU" altLang="ru-RU" dirty="0">
                 <a:latin typeface="Times New Roman" panose="02020603050405020304" pitchFamily="18" charset="0"/>
                 <a:cs typeface="Times New Roman" panose="02020603050405020304" pitchFamily="18" charset="0"/>
               </a:rPr>
@@ -8046,26 +8375,26 @@
             </a:r>
           </a:p>
           <a:p>
-            <a:pPr marL="285750" indent="-285750">
+            <a:pPr marL="285750" indent="-285750" algn="just">
               <a:buFont typeface="Arial" panose="020B0604020202020204" pitchFamily="34" charset="0"/>
               <a:buChar char="•"/>
             </a:pPr>
             <a:r>
-              <a:rPr lang="ru-RU" altLang="ru-RU" sz="1400" dirty="0">
+              <a:rPr lang="ru-RU" altLang="ru-RU" dirty="0">
                 <a:latin typeface="Times New Roman" panose="02020603050405020304" pitchFamily="18" charset="0"/>
                 <a:cs typeface="Times New Roman" panose="02020603050405020304" pitchFamily="18" charset="0"/>
               </a:rPr>
               <a:t>Текстовые файлы (</a:t>
             </a:r>
             <a:r>
-              <a:rPr lang="ru-RU" altLang="ru-RU" sz="1400" dirty="0" err="1">
+              <a:rPr lang="ru-RU" altLang="ru-RU" dirty="0" err="1">
                 <a:latin typeface="Times New Roman" panose="02020603050405020304" pitchFamily="18" charset="0"/>
                 <a:cs typeface="Times New Roman" panose="02020603050405020304" pitchFamily="18" charset="0"/>
               </a:rPr>
               <a:t>txt</a:t>
             </a:r>
             <a:r>
-              <a:rPr lang="ru-RU" altLang="ru-RU" sz="1400" dirty="0">
+              <a:rPr lang="ru-RU" altLang="ru-RU" dirty="0">
                 <a:latin typeface="Times New Roman" panose="02020603050405020304" pitchFamily="18" charset="0"/>
                 <a:cs typeface="Times New Roman" panose="02020603050405020304" pitchFamily="18" charset="0"/>
               </a:rPr>
@@ -8073,12 +8402,12 @@
             </a:r>
           </a:p>
           <a:p>
-            <a:pPr marL="285750" indent="-285750">
+            <a:pPr marL="285750" indent="-285750" algn="just">
               <a:buFont typeface="Arial" panose="020B0604020202020204" pitchFamily="34" charset="0"/>
               <a:buChar char="•"/>
             </a:pPr>
             <a:r>
-              <a:rPr lang="ru-RU" altLang="ru-RU" sz="1400" dirty="0">
+              <a:rPr lang="ru-RU" altLang="ru-RU" dirty="0">
                 <a:latin typeface="Times New Roman" panose="02020603050405020304" pitchFamily="18" charset="0"/>
                 <a:cs typeface="Times New Roman" panose="02020603050405020304" pitchFamily="18" charset="0"/>
               </a:rPr>
@@ -8086,8 +8415,9 @@
             </a:r>
           </a:p>
           <a:p>
-            <a:r>
-              <a:rPr lang="ru-RU" altLang="ru-RU" sz="1400" dirty="0">
+            <a:pPr algn="just"/>
+            <a:r>
+              <a:rPr lang="ru-RU" altLang="ru-RU" dirty="0">
                 <a:latin typeface="Times New Roman" panose="02020603050405020304" pitchFamily="18" charset="0"/>
                 <a:cs typeface="Times New Roman" panose="02020603050405020304" pitchFamily="18" charset="0"/>
               </a:rPr>
@@ -8095,40 +8425,40 @@
             </a:r>
           </a:p>
           <a:p>
-            <a:pPr marL="285750" indent="-285750">
+            <a:pPr marL="285750" indent="-285750" algn="just">
               <a:buFont typeface="Arial" panose="020B0604020202020204" pitchFamily="34" charset="0"/>
               <a:buChar char="•"/>
             </a:pPr>
             <a:r>
-              <a:rPr lang="ru-RU" altLang="ru-RU" sz="1400" dirty="0">
+              <a:rPr lang="ru-RU" altLang="ru-RU" dirty="0">
                 <a:latin typeface="Times New Roman" panose="02020603050405020304" pitchFamily="18" charset="0"/>
                 <a:cs typeface="Times New Roman" panose="02020603050405020304" pitchFamily="18" charset="0"/>
               </a:rPr>
               <a:t>Табличные файлы (</a:t>
             </a:r>
             <a:r>
-              <a:rPr lang="ru-RU" altLang="ru-RU" sz="1400" dirty="0" err="1">
+              <a:rPr lang="ru-RU" altLang="ru-RU" dirty="0" err="1">
                 <a:latin typeface="Times New Roman" panose="02020603050405020304" pitchFamily="18" charset="0"/>
                 <a:cs typeface="Times New Roman" panose="02020603050405020304" pitchFamily="18" charset="0"/>
               </a:rPr>
               <a:t>xlsx</a:t>
             </a:r>
             <a:r>
-              <a:rPr lang="ru-RU" altLang="ru-RU" sz="1400" dirty="0">
+              <a:rPr lang="ru-RU" altLang="ru-RU" dirty="0">
                 <a:latin typeface="Times New Roman" panose="02020603050405020304" pitchFamily="18" charset="0"/>
                 <a:cs typeface="Times New Roman" panose="02020603050405020304" pitchFamily="18" charset="0"/>
               </a:rPr>
               <a:t>, </a:t>
             </a:r>
             <a:r>
-              <a:rPr lang="ru-RU" altLang="ru-RU" sz="1400" dirty="0" err="1">
+              <a:rPr lang="ru-RU" altLang="ru-RU" dirty="0" err="1">
                 <a:latin typeface="Times New Roman" panose="02020603050405020304" pitchFamily="18" charset="0"/>
                 <a:cs typeface="Times New Roman" panose="02020603050405020304" pitchFamily="18" charset="0"/>
               </a:rPr>
               <a:t>odt</a:t>
             </a:r>
             <a:r>
-              <a:rPr lang="ru-RU" altLang="ru-RU" sz="1400" dirty="0">
+              <a:rPr lang="ru-RU" altLang="ru-RU" dirty="0">
                 <a:latin typeface="Times New Roman" panose="02020603050405020304" pitchFamily="18" charset="0"/>
                 <a:cs typeface="Times New Roman" panose="02020603050405020304" pitchFamily="18" charset="0"/>
               </a:rPr>
@@ -8136,12 +8466,12 @@
             </a:r>
           </a:p>
           <a:p>
-            <a:pPr marL="285750" indent="-285750">
+            <a:pPr marL="285750" indent="-285750" algn="just">
               <a:buFont typeface="Arial" panose="020B0604020202020204" pitchFamily="34" charset="0"/>
               <a:buChar char="•"/>
             </a:pPr>
             <a:r>
-              <a:rPr lang="ru-RU" altLang="ru-RU" sz="1400" dirty="0">
+              <a:rPr lang="ru-RU" altLang="ru-RU" dirty="0">
                 <a:latin typeface="Times New Roman" panose="02020603050405020304" pitchFamily="18" charset="0"/>
                 <a:cs typeface="Times New Roman" panose="02020603050405020304" pitchFamily="18" charset="0"/>
               </a:rPr>
@@ -8149,8 +8479,9 @@
             </a:r>
           </a:p>
           <a:p>
-            <a:r>
-              <a:rPr lang="ru-RU" altLang="ru-RU" sz="1400" dirty="0">
+            <a:pPr algn="just"/>
+            <a:r>
+              <a:rPr lang="ru-RU" altLang="ru-RU" dirty="0">
                 <a:latin typeface="Times New Roman" panose="02020603050405020304" pitchFamily="18" charset="0"/>
                 <a:cs typeface="Times New Roman" panose="02020603050405020304" pitchFamily="18" charset="0"/>
               </a:rPr>
@@ -8158,40 +8489,40 @@
             </a:r>
           </a:p>
           <a:p>
-            <a:pPr marL="285750" indent="-285750">
+            <a:pPr marL="285750" indent="-285750" algn="just">
               <a:buFont typeface="Arial" panose="020B0604020202020204" pitchFamily="34" charset="0"/>
               <a:buChar char="•"/>
             </a:pPr>
             <a:r>
-              <a:rPr lang="ru-RU" altLang="ru-RU" sz="1400" dirty="0">
+              <a:rPr lang="ru-RU" altLang="ru-RU" dirty="0">
                 <a:latin typeface="Times New Roman" panose="02020603050405020304" pitchFamily="18" charset="0"/>
                 <a:cs typeface="Times New Roman" panose="02020603050405020304" pitchFamily="18" charset="0"/>
               </a:rPr>
               <a:t>Изображения (</a:t>
             </a:r>
             <a:r>
-              <a:rPr lang="ru-RU" altLang="ru-RU" sz="1400" dirty="0" err="1">
+              <a:rPr lang="ru-RU" altLang="ru-RU" dirty="0" err="1">
                 <a:latin typeface="Times New Roman" panose="02020603050405020304" pitchFamily="18" charset="0"/>
                 <a:cs typeface="Times New Roman" panose="02020603050405020304" pitchFamily="18" charset="0"/>
               </a:rPr>
               <a:t>png</a:t>
             </a:r>
             <a:r>
-              <a:rPr lang="ru-RU" altLang="ru-RU" sz="1400" dirty="0">
+              <a:rPr lang="ru-RU" altLang="ru-RU" dirty="0">
                 <a:latin typeface="Times New Roman" panose="02020603050405020304" pitchFamily="18" charset="0"/>
                 <a:cs typeface="Times New Roman" panose="02020603050405020304" pitchFamily="18" charset="0"/>
               </a:rPr>
               <a:t>, </a:t>
             </a:r>
             <a:r>
-              <a:rPr lang="ru-RU" altLang="ru-RU" sz="1400" dirty="0" err="1">
+              <a:rPr lang="ru-RU" altLang="ru-RU" dirty="0" err="1">
                 <a:latin typeface="Times New Roman" panose="02020603050405020304" pitchFamily="18" charset="0"/>
                 <a:cs typeface="Times New Roman" panose="02020603050405020304" pitchFamily="18" charset="0"/>
               </a:rPr>
               <a:t>jpg</a:t>
             </a:r>
             <a:r>
-              <a:rPr lang="ru-RU" altLang="ru-RU" sz="1400" dirty="0">
+              <a:rPr lang="ru-RU" altLang="ru-RU" dirty="0">
                 <a:latin typeface="Times New Roman" panose="02020603050405020304" pitchFamily="18" charset="0"/>
                 <a:cs typeface="Times New Roman" panose="02020603050405020304" pitchFamily="18" charset="0"/>
               </a:rPr>
@@ -8199,166 +8530,17 @@
             </a:r>
           </a:p>
           <a:p>
-            <a:pPr marL="285750" indent="-285750">
+            <a:pPr marL="285750" indent="-285750" algn="just">
               <a:buFont typeface="Arial" panose="020B0604020202020204" pitchFamily="34" charset="0"/>
               <a:buChar char="•"/>
             </a:pPr>
             <a:r>
-              <a:rPr lang="ru-RU" altLang="ru-RU" sz="1400" dirty="0">
+              <a:rPr lang="ru-RU" altLang="ru-RU" dirty="0">
                 <a:latin typeface="Times New Roman" panose="02020603050405020304" pitchFamily="18" charset="0"/>
                 <a:cs typeface="Times New Roman" panose="02020603050405020304" pitchFamily="18" charset="0"/>
               </a:rPr>
               <a:t>Упаковка изображений незначительно изменяет их энтропию, что указывает на высокую эффективность сжатия.</a:t>
             </a:r>
-          </a:p>
-          <a:p>
-            <a:r>
-              <a:rPr lang="ru-RU" altLang="ru-RU" sz="1400" dirty="0">
-                <a:latin typeface="Times New Roman" panose="02020603050405020304" pitchFamily="18" charset="0"/>
-                <a:cs typeface="Times New Roman" panose="02020603050405020304" pitchFamily="18" charset="0"/>
-              </a:rPr>
-              <a:t>5) Аудио файлы:</a:t>
-            </a:r>
-          </a:p>
-          <a:p>
-            <a:pPr marL="285750" indent="-285750">
-              <a:buFont typeface="Arial" panose="020B0604020202020204" pitchFamily="34" charset="0"/>
-              <a:buChar char="•"/>
-            </a:pPr>
-            <a:r>
-              <a:rPr lang="ru-RU" altLang="ru-RU" sz="1400" dirty="0">
-                <a:latin typeface="Times New Roman" panose="02020603050405020304" pitchFamily="18" charset="0"/>
-                <a:cs typeface="Times New Roman" panose="02020603050405020304" pitchFamily="18" charset="0"/>
-              </a:rPr>
-              <a:t>Аудио файлы (mp3, </a:t>
-            </a:r>
-            <a:r>
-              <a:rPr lang="ru-RU" altLang="ru-RU" sz="1400" dirty="0" err="1">
-                <a:latin typeface="Times New Roman" panose="02020603050405020304" pitchFamily="18" charset="0"/>
-                <a:cs typeface="Times New Roman" panose="02020603050405020304" pitchFamily="18" charset="0"/>
-              </a:rPr>
-              <a:t>wav</a:t>
-            </a:r>
-            <a:r>
-              <a:rPr lang="ru-RU" altLang="ru-RU" sz="1400" dirty="0">
-                <a:latin typeface="Times New Roman" panose="02020603050405020304" pitchFamily="18" charset="0"/>
-                <a:cs typeface="Times New Roman" panose="02020603050405020304" pitchFamily="18" charset="0"/>
-              </a:rPr>
-              <a:t>) имеют высокую энтропию, что связано с их сложной структурой и большим количеством уникальных данных.</a:t>
-            </a:r>
-          </a:p>
-          <a:p>
-            <a:pPr marL="285750" indent="-285750">
-              <a:buFont typeface="Arial" panose="020B0604020202020204" pitchFamily="34" charset="0"/>
-              <a:buChar char="•"/>
-            </a:pPr>
-            <a:r>
-              <a:rPr lang="ru-RU" altLang="ru-RU" sz="1400" dirty="0">
-                <a:latin typeface="Times New Roman" panose="02020603050405020304" pitchFamily="18" charset="0"/>
-                <a:cs typeface="Times New Roman" panose="02020603050405020304" pitchFamily="18" charset="0"/>
-              </a:rPr>
-              <a:t>Упаковка аудио файлов незначительно изменяет их энтропию, что указывает на высокую эффективность сжатия.</a:t>
-            </a:r>
-          </a:p>
-          <a:p>
-            <a:r>
-              <a:rPr lang="ru-RU" altLang="ru-RU" sz="1400" dirty="0">
-                <a:latin typeface="Times New Roman" panose="02020603050405020304" pitchFamily="18" charset="0"/>
-                <a:cs typeface="Times New Roman" panose="02020603050405020304" pitchFamily="18" charset="0"/>
-              </a:rPr>
-              <a:t>6) Упаковка файлов:</a:t>
-            </a:r>
-          </a:p>
-          <a:p>
-            <a:pPr marL="285750" indent="-285750">
-              <a:buFont typeface="Arial" panose="020B0604020202020204" pitchFamily="34" charset="0"/>
-              <a:buChar char="•"/>
-            </a:pPr>
-            <a:r>
-              <a:rPr lang="ru-RU" altLang="ru-RU" sz="1400" dirty="0">
-                <a:latin typeface="Times New Roman" panose="02020603050405020304" pitchFamily="18" charset="0"/>
-                <a:cs typeface="Times New Roman" panose="02020603050405020304" pitchFamily="18" charset="0"/>
-              </a:rPr>
-              <a:t>Упаковка файлов значительно увеличивает их энтропию, что связано с добавлением дополнительных данных и сжатием.</a:t>
-            </a:r>
-          </a:p>
-          <a:p>
-            <a:pPr marL="285750" indent="-285750">
-              <a:buFont typeface="Arial" panose="020B0604020202020204" pitchFamily="34" charset="0"/>
-              <a:buChar char="•"/>
-            </a:pPr>
-            <a:r>
-              <a:rPr lang="ru-RU" altLang="ru-RU" sz="1400" dirty="0">
-                <a:latin typeface="Times New Roman" panose="02020603050405020304" pitchFamily="18" charset="0"/>
-                <a:cs typeface="Times New Roman" panose="02020603050405020304" pitchFamily="18" charset="0"/>
-              </a:rPr>
-              <a:t>Упаковка файлов также уменьшает их размер, что указывает на высокую эффективность сжатия.</a:t>
-            </a:r>
-          </a:p>
-          <a:p>
-            <a:r>
-              <a:rPr lang="ru-RU" altLang="ru-RU" sz="1400" dirty="0">
-                <a:latin typeface="Times New Roman" panose="02020603050405020304" pitchFamily="18" charset="0"/>
-                <a:cs typeface="Times New Roman" panose="02020603050405020304" pitchFamily="18" charset="0"/>
-              </a:rPr>
-              <a:t>7) Отношение размеров и энтропий:</a:t>
-            </a:r>
-          </a:p>
-          <a:p>
-            <a:pPr marL="285750" indent="-285750">
-              <a:buFont typeface="Arial" panose="020B0604020202020204" pitchFamily="34" charset="0"/>
-              <a:buChar char="•"/>
-            </a:pPr>
-            <a:r>
-              <a:rPr lang="ru-RU" altLang="ru-RU" sz="1400" dirty="0">
-                <a:latin typeface="Times New Roman" panose="02020603050405020304" pitchFamily="18" charset="0"/>
-                <a:cs typeface="Times New Roman" panose="02020603050405020304" pitchFamily="18" charset="0"/>
-              </a:rPr>
-              <a:t>Отношение размеров упакованных и неупакованных файлов показывает, что упаковка значительно уменьшает размер файлов.</a:t>
-            </a:r>
-          </a:p>
-          <a:p>
-            <a:pPr marL="285750" indent="-285750">
-              <a:buFont typeface="Arial" panose="020B0604020202020204" pitchFamily="34" charset="0"/>
-              <a:buChar char="•"/>
-            </a:pPr>
-            <a:r>
-              <a:rPr lang="ru-RU" altLang="ru-RU" sz="1400" dirty="0">
-                <a:latin typeface="Times New Roman" panose="02020603050405020304" pitchFamily="18" charset="0"/>
-                <a:cs typeface="Times New Roman" panose="02020603050405020304" pitchFamily="18" charset="0"/>
-              </a:rPr>
-              <a:t>Отношение энтропий упакованных и неупакованных файлов показывает, что упаковка значительно увеличивает энтропию файлов.</a:t>
-            </a:r>
-          </a:p>
-          <a:p>
-            <a:r>
-              <a:rPr lang="ru-RU" altLang="ru-RU" sz="1400" dirty="0">
-                <a:latin typeface="Times New Roman" panose="02020603050405020304" pitchFamily="18" charset="0"/>
-                <a:cs typeface="Times New Roman" panose="02020603050405020304" pitchFamily="18" charset="0"/>
-              </a:rPr>
-              <a:t>Заключение:</a:t>
-            </a:r>
-          </a:p>
-          <a:p>
-            <a:r>
-              <a:rPr lang="ru-RU" altLang="ru-RU" sz="1400" dirty="0">
-                <a:latin typeface="Times New Roman" panose="02020603050405020304" pitchFamily="18" charset="0"/>
-                <a:cs typeface="Times New Roman" panose="02020603050405020304" pitchFamily="18" charset="0"/>
-              </a:rPr>
-              <a:t>В ходе выполнения лабораторной работы были исследованы различные типы файлов и их энтропия. Было показано, что упаковка файлов значительно увеличивает их энтропию и уменьшает их размер. Это указывает на высокую эффективность сжатия и возможность использования упаковки для уменьшения размера файлов.</a:t>
-            </a:r>
-          </a:p>
-          <a:p>
-            <a:endParaRPr lang="ru-RU" altLang="ru-RU" sz="1400" dirty="0">
-              <a:latin typeface="Times New Roman" panose="02020603050405020304" pitchFamily="18" charset="0"/>
-              <a:cs typeface="Times New Roman" panose="02020603050405020304" pitchFamily="18" charset="0"/>
-            </a:endParaRPr>
-          </a:p>
-          <a:p>
-            <a:endParaRPr lang="en-US" altLang="ru-RU" sz="1400" dirty="0">
-              <a:latin typeface="Times New Roman" panose="02020603050405020304" pitchFamily="18" charset="0"/>
-              <a:cs typeface="Times New Roman" panose="02020603050405020304" pitchFamily="18" charset="0"/>
-            </a:endParaRPr>
           </a:p>
         </p:txBody>
       </p:sp>
@@ -8392,6 +8574,265 @@
         </p:txBody>
       </p:sp>
     </p:spTree>
+  </p:cSld>
+  <p:clrMapOvr>
+    <a:masterClrMapping/>
+  </p:clrMapOvr>
+</p:sld>
+</file>
+
+<file path=ppt/slides/slide25.xml><?xml version="1.0" encoding="utf-8"?>
+<p:sld xmlns:a="http://schemas.openxmlformats.org/drawingml/2006/main" xmlns:r="http://schemas.openxmlformats.org/officeDocument/2006/relationships" xmlns:p="http://schemas.openxmlformats.org/presentationml/2006/main">
+  <p:cSld>
+    <p:spTree>
+      <p:nvGrpSpPr>
+        <p:cNvPr id="1" name=""/>
+        <p:cNvGrpSpPr/>
+        <p:nvPr/>
+      </p:nvGrpSpPr>
+      <p:grpSpPr>
+        <a:xfrm>
+          <a:off x="0" y="0"/>
+          <a:ext cx="0" cy="0"/>
+          <a:chOff x="0" y="0"/>
+          <a:chExt cx="0" cy="0"/>
+        </a:xfrm>
+      </p:grpSpPr>
+      <p:sp>
+        <p:nvSpPr>
+          <p:cNvPr id="2" name="Текстовое поле 1"/>
+          <p:cNvSpPr txBox="1"/>
+          <p:nvPr/>
+        </p:nvSpPr>
+        <p:spPr>
+          <a:xfrm>
+            <a:off x="281940" y="649605"/>
+            <a:ext cx="11628120" cy="6093976"/>
+          </a:xfrm>
+          <a:prstGeom prst="rect">
+            <a:avLst/>
+          </a:prstGeom>
+          <a:noFill/>
+        </p:spPr>
+        <p:txBody>
+          <a:bodyPr wrap="square" rtlCol="0">
+            <a:spAutoFit/>
+          </a:bodyPr>
+          <a:lstStyle/>
+          <a:p>
+            <a:pPr algn="just"/>
+            <a:r>
+              <a:rPr lang="ru-RU" altLang="ru-RU" sz="2400" b="1" dirty="0">
+                <a:latin typeface="Times New Roman" panose="02020603050405020304" pitchFamily="18" charset="0"/>
+                <a:cs typeface="Times New Roman" panose="02020603050405020304" pitchFamily="18" charset="0"/>
+              </a:rPr>
+              <a:t>Вывод:</a:t>
+            </a:r>
+            <a:endParaRPr lang="en-US" altLang="ru-RU" sz="2400" b="1" dirty="0">
+              <a:latin typeface="Times New Roman" panose="02020603050405020304" pitchFamily="18" charset="0"/>
+              <a:cs typeface="Times New Roman" panose="02020603050405020304" pitchFamily="18" charset="0"/>
+            </a:endParaRPr>
+          </a:p>
+          <a:p>
+            <a:pPr algn="just"/>
+            <a:endParaRPr lang="ru-RU" altLang="ru-RU" sz="2400" b="1" dirty="0">
+              <a:latin typeface="Times New Roman" panose="02020603050405020304" pitchFamily="18" charset="0"/>
+              <a:cs typeface="Times New Roman" panose="02020603050405020304" pitchFamily="18" charset="0"/>
+            </a:endParaRPr>
+          </a:p>
+          <a:p>
+            <a:pPr algn="just"/>
+            <a:r>
+              <a:rPr lang="ru-RU" altLang="ru-RU" dirty="0">
+                <a:latin typeface="Times New Roman" panose="02020603050405020304" pitchFamily="18" charset="0"/>
+                <a:cs typeface="Times New Roman" panose="02020603050405020304" pitchFamily="18" charset="0"/>
+              </a:rPr>
+              <a:t>5) Аудио файлы:</a:t>
+            </a:r>
+          </a:p>
+          <a:p>
+            <a:pPr marL="285750" indent="-285750" algn="just">
+              <a:buFont typeface="Arial" panose="020B0604020202020204" pitchFamily="34" charset="0"/>
+              <a:buChar char="•"/>
+            </a:pPr>
+            <a:r>
+              <a:rPr lang="ru-RU" altLang="ru-RU" dirty="0">
+                <a:latin typeface="Times New Roman" panose="02020603050405020304" pitchFamily="18" charset="0"/>
+                <a:cs typeface="Times New Roman" panose="02020603050405020304" pitchFamily="18" charset="0"/>
+              </a:rPr>
+              <a:t>Аудио файлы (mp3, </a:t>
+            </a:r>
+            <a:r>
+              <a:rPr lang="ru-RU" altLang="ru-RU" dirty="0" err="1">
+                <a:latin typeface="Times New Roman" panose="02020603050405020304" pitchFamily="18" charset="0"/>
+                <a:cs typeface="Times New Roman" panose="02020603050405020304" pitchFamily="18" charset="0"/>
+              </a:rPr>
+              <a:t>wav</a:t>
+            </a:r>
+            <a:r>
+              <a:rPr lang="ru-RU" altLang="ru-RU" dirty="0">
+                <a:latin typeface="Times New Roman" panose="02020603050405020304" pitchFamily="18" charset="0"/>
+                <a:cs typeface="Times New Roman" panose="02020603050405020304" pitchFamily="18" charset="0"/>
+              </a:rPr>
+              <a:t>) имеют высокую энтропию, что связано с их сложной структурой и большим количеством уникальных данных.</a:t>
+            </a:r>
+          </a:p>
+          <a:p>
+            <a:pPr marL="285750" indent="-285750" algn="just">
+              <a:buFont typeface="Arial" panose="020B0604020202020204" pitchFamily="34" charset="0"/>
+              <a:buChar char="•"/>
+            </a:pPr>
+            <a:r>
+              <a:rPr lang="ru-RU" altLang="ru-RU" dirty="0">
+                <a:latin typeface="Times New Roman" panose="02020603050405020304" pitchFamily="18" charset="0"/>
+                <a:cs typeface="Times New Roman" panose="02020603050405020304" pitchFamily="18" charset="0"/>
+              </a:rPr>
+              <a:t>Упаковка аудио файлов незначительно изменяет их энтропию, что указывает на высокую эффективность сжатия.</a:t>
+            </a:r>
+          </a:p>
+          <a:p>
+            <a:pPr algn="just"/>
+            <a:r>
+              <a:rPr lang="ru-RU" altLang="ru-RU" dirty="0">
+                <a:latin typeface="Times New Roman" panose="02020603050405020304" pitchFamily="18" charset="0"/>
+                <a:cs typeface="Times New Roman" panose="02020603050405020304" pitchFamily="18" charset="0"/>
+              </a:rPr>
+              <a:t>6) Упаковка файлов:</a:t>
+            </a:r>
+          </a:p>
+          <a:p>
+            <a:pPr marL="285750" indent="-285750" algn="just">
+              <a:buFont typeface="Arial" panose="020B0604020202020204" pitchFamily="34" charset="0"/>
+              <a:buChar char="•"/>
+            </a:pPr>
+            <a:r>
+              <a:rPr lang="ru-RU" altLang="ru-RU" dirty="0">
+                <a:latin typeface="Times New Roman" panose="02020603050405020304" pitchFamily="18" charset="0"/>
+                <a:cs typeface="Times New Roman" panose="02020603050405020304" pitchFamily="18" charset="0"/>
+              </a:rPr>
+              <a:t>Упаковка файлов значительно увеличивает их энтропию, что связано с добавлением дополнительных данных и сжатием.</a:t>
+            </a:r>
+          </a:p>
+          <a:p>
+            <a:pPr marL="285750" indent="-285750" algn="just">
+              <a:buFont typeface="Arial" panose="020B0604020202020204" pitchFamily="34" charset="0"/>
+              <a:buChar char="•"/>
+            </a:pPr>
+            <a:r>
+              <a:rPr lang="ru-RU" altLang="ru-RU" dirty="0">
+                <a:latin typeface="Times New Roman" panose="02020603050405020304" pitchFamily="18" charset="0"/>
+                <a:cs typeface="Times New Roman" panose="02020603050405020304" pitchFamily="18" charset="0"/>
+              </a:rPr>
+              <a:t>Упаковка файлов также уменьшает их размер, что указывает на высокую эффективность сжатия.</a:t>
+            </a:r>
+          </a:p>
+          <a:p>
+            <a:pPr algn="just"/>
+            <a:r>
+              <a:rPr lang="ru-RU" altLang="ru-RU" dirty="0">
+                <a:latin typeface="Times New Roman" panose="02020603050405020304" pitchFamily="18" charset="0"/>
+                <a:cs typeface="Times New Roman" panose="02020603050405020304" pitchFamily="18" charset="0"/>
+              </a:rPr>
+              <a:t>7) Отношение размеров и энтропий:</a:t>
+            </a:r>
+          </a:p>
+          <a:p>
+            <a:pPr marL="285750" indent="-285750" algn="just">
+              <a:buFont typeface="Arial" panose="020B0604020202020204" pitchFamily="34" charset="0"/>
+              <a:buChar char="•"/>
+            </a:pPr>
+            <a:r>
+              <a:rPr lang="ru-RU" altLang="ru-RU" dirty="0">
+                <a:latin typeface="Times New Roman" panose="02020603050405020304" pitchFamily="18" charset="0"/>
+                <a:cs typeface="Times New Roman" panose="02020603050405020304" pitchFamily="18" charset="0"/>
+              </a:rPr>
+              <a:t>Отношение размеров упакованных и неупакованных файлов показывает, что упаковка значительно уменьшает размер файлов.</a:t>
+            </a:r>
+          </a:p>
+          <a:p>
+            <a:pPr marL="285750" indent="-285750" algn="just">
+              <a:buFont typeface="Arial" panose="020B0604020202020204" pitchFamily="34" charset="0"/>
+              <a:buChar char="•"/>
+            </a:pPr>
+            <a:r>
+              <a:rPr lang="ru-RU" altLang="ru-RU" dirty="0">
+                <a:latin typeface="Times New Roman" panose="02020603050405020304" pitchFamily="18" charset="0"/>
+                <a:cs typeface="Times New Roman" panose="02020603050405020304" pitchFamily="18" charset="0"/>
+              </a:rPr>
+              <a:t>Отношение энтропий упакованных и неупакованных файлов показывает, что упаковка значительно увеличивает энтропию файлов.</a:t>
+            </a:r>
+          </a:p>
+          <a:p>
+            <a:pPr algn="just"/>
+            <a:r>
+              <a:rPr lang="ru-RU" altLang="ru-RU" dirty="0">
+                <a:latin typeface="Times New Roman" panose="02020603050405020304" pitchFamily="18" charset="0"/>
+                <a:cs typeface="Times New Roman" panose="02020603050405020304" pitchFamily="18" charset="0"/>
+              </a:rPr>
+              <a:t>Заключение:</a:t>
+            </a:r>
+          </a:p>
+          <a:p>
+            <a:pPr algn="just"/>
+            <a:r>
+              <a:rPr lang="ru-RU" altLang="ru-RU" dirty="0">
+                <a:latin typeface="Times New Roman" panose="02020603050405020304" pitchFamily="18" charset="0"/>
+                <a:cs typeface="Times New Roman" panose="02020603050405020304" pitchFamily="18" charset="0"/>
+              </a:rPr>
+              <a:t>В ходе выполнения лабораторной работы были исследованы различные типы файлов и их энтропия. Показано, что упаковка файлов значительно увеличивает их энтропию и уменьшает их размер. Это указывает на высокую эффективность сжатия и возможность использования упаковки для уменьшения размера файлов.</a:t>
+            </a:r>
+          </a:p>
+          <a:p>
+            <a:pPr algn="just"/>
+            <a:endParaRPr lang="ru-RU" altLang="ru-RU" dirty="0">
+              <a:latin typeface="Times New Roman" panose="02020603050405020304" pitchFamily="18" charset="0"/>
+              <a:cs typeface="Times New Roman" panose="02020603050405020304" pitchFamily="18" charset="0"/>
+            </a:endParaRPr>
+          </a:p>
+          <a:p>
+            <a:pPr algn="just"/>
+            <a:endParaRPr lang="en-US" altLang="ru-RU" dirty="0">
+              <a:latin typeface="Times New Roman" panose="02020603050405020304" pitchFamily="18" charset="0"/>
+              <a:cs typeface="Times New Roman" panose="02020603050405020304" pitchFamily="18" charset="0"/>
+            </a:endParaRPr>
+          </a:p>
+        </p:txBody>
+      </p:sp>
+      <p:sp>
+        <p:nvSpPr>
+          <p:cNvPr id="3" name="Номер слайда 2">
+            <a:extLst>
+              <a:ext uri="{FF2B5EF4-FFF2-40B4-BE49-F238E27FC236}">
+                <a16:creationId xmlns:a16="http://schemas.microsoft.com/office/drawing/2014/main" id="{EFD6194F-63BA-46FB-BF6B-0C401F00D9E9}"/>
+              </a:ext>
+            </a:extLst>
+          </p:cNvPr>
+          <p:cNvSpPr>
+            <a:spLocks noGrp="1"/>
+          </p:cNvSpPr>
+          <p:nvPr>
+            <p:ph type="sldNum" sz="quarter" idx="12"/>
+          </p:nvPr>
+        </p:nvSpPr>
+        <p:spPr/>
+        <p:txBody>
+          <a:bodyPr/>
+          <a:lstStyle/>
+          <a:p>
+            <a:fld id="{E7071148-F1FE-4D36-8801-91DDAE74A626}" type="slidenum">
+              <a:rPr lang="ru-RU" smtClean="0"/>
+              <a:t>25</a:t>
+            </a:fld>
+            <a:endParaRPr lang="ru-RU"/>
+          </a:p>
+        </p:txBody>
+      </p:sp>
+    </p:spTree>
+    <p:extLst>
+      <p:ext uri="{BB962C8B-B14F-4D97-AF65-F5344CB8AC3E}">
+        <p14:creationId xmlns:p14="http://schemas.microsoft.com/office/powerpoint/2010/main" val="479555039"/>
+      </p:ext>
+    </p:extLst>
   </p:cSld>
   <p:clrMapOvr>
     <a:masterClrMapping/>
@@ -8564,7 +9005,7 @@
         <p:spPr>
           <a:xfrm>
             <a:off x="6095999" y="5570554"/>
-            <a:ext cx="3614900" cy="369332"/>
+            <a:ext cx="4240071" cy="369332"/>
           </a:xfrm>
           <a:prstGeom prst="rect">
             <a:avLst/>
@@ -8595,8 +9036,19 @@
                 <a:latin typeface="Times New Roman" panose="02020603050405020304" pitchFamily="18" charset="0"/>
                 <a:cs typeface="Times New Roman" panose="02020603050405020304" pitchFamily="18" charset="0"/>
               </a:rPr>
-              <a:t> – Шестнадцатеричный дамп</a:t>
-            </a:r>
+              <a:t> – Шестнадцатеричный дамп </a:t>
+            </a:r>
+            <a:r>
+              <a:rPr lang="en-US" dirty="0">
+                <a:latin typeface="Times New Roman" panose="02020603050405020304" pitchFamily="18" charset="0"/>
+                <a:cs typeface="Times New Roman" panose="02020603050405020304" pitchFamily="18" charset="0"/>
+              </a:rPr>
+              <a:t>(C++)</a:t>
+            </a:r>
+            <a:endParaRPr lang="ru-RU" dirty="0">
+              <a:latin typeface="Times New Roman" panose="02020603050405020304" pitchFamily="18" charset="0"/>
+              <a:cs typeface="Times New Roman" panose="02020603050405020304" pitchFamily="18" charset="0"/>
+            </a:endParaRPr>
           </a:p>
         </p:txBody>
       </p:sp>
@@ -8703,8 +9155,8 @@
         </p:nvSpPr>
         <p:spPr>
           <a:xfrm>
-            <a:off x="1449660" y="6211969"/>
-            <a:ext cx="4269135" cy="369332"/>
+            <a:off x="1071326" y="6191764"/>
+            <a:ext cx="5510335" cy="369332"/>
           </a:xfrm>
           <a:prstGeom prst="rect">
             <a:avLst/>
@@ -8722,7 +9174,35 @@
                 <a:latin typeface="Times New Roman" panose="02020603050405020304" pitchFamily="18" charset="0"/>
                 <a:cs typeface="Times New Roman" panose="02020603050405020304" pitchFamily="18" charset="0"/>
               </a:rPr>
-              <a:t>Рис. 3 – Дизассемблирование программы </a:t>
+              <a:t>Рис. 3 – Дизассемблирование программы</a:t>
+            </a:r>
+            <a:r>
+              <a:rPr lang="en-US" dirty="0">
+                <a:latin typeface="Times New Roman" panose="02020603050405020304" pitchFamily="18" charset="0"/>
+                <a:cs typeface="Times New Roman" panose="02020603050405020304" pitchFamily="18" charset="0"/>
+              </a:rPr>
+              <a:t> </a:t>
+            </a:r>
+            <a:r>
+              <a:rPr lang="ru-RU" dirty="0">
+                <a:latin typeface="Times New Roman" panose="02020603050405020304" pitchFamily="18" charset="0"/>
+                <a:cs typeface="Times New Roman" panose="02020603050405020304" pitchFamily="18" charset="0"/>
+              </a:rPr>
+              <a:t>на ЯП</a:t>
+            </a:r>
+            <a:r>
+              <a:rPr lang="en-US" dirty="0">
+                <a:latin typeface="Times New Roman" panose="02020603050405020304" pitchFamily="18" charset="0"/>
+                <a:cs typeface="Times New Roman" panose="02020603050405020304" pitchFamily="18" charset="0"/>
+              </a:rPr>
+              <a:t> C++</a:t>
+            </a:r>
+            <a:r>
+              <a:rPr lang="ru-RU" dirty="0">
+                <a:latin typeface="Times New Roman" panose="02020603050405020304" pitchFamily="18" charset="0"/>
+                <a:cs typeface="Times New Roman" panose="02020603050405020304" pitchFamily="18" charset="0"/>
+              </a:rPr>
+              <a:t> </a:t>
             </a:r>
           </a:p>
         </p:txBody>
@@ -8776,8 +9256,8 @@
         </p:nvSpPr>
         <p:spPr>
           <a:xfrm>
-            <a:off x="7846219" y="6206372"/>
-            <a:ext cx="3581943" cy="369332"/>
+            <a:off x="7257974" y="6211969"/>
+            <a:ext cx="4758433" cy="369332"/>
           </a:xfrm>
           <a:prstGeom prst="rect">
             <a:avLst/>
@@ -8797,6 +9277,31 @@
               </a:rPr>
               <a:t>Рис. 4 – Информация о программе</a:t>
             </a:r>
+            <a:r>
+              <a:rPr lang="en-US" dirty="0">
+                <a:latin typeface="Times New Roman" panose="02020603050405020304" pitchFamily="18" charset="0"/>
+                <a:cs typeface="Times New Roman" panose="02020603050405020304" pitchFamily="18" charset="0"/>
+              </a:rPr>
+              <a:t> </a:t>
+            </a:r>
+            <a:r>
+              <a:rPr lang="ru-RU" dirty="0">
+                <a:latin typeface="Times New Roman" panose="02020603050405020304" pitchFamily="18" charset="0"/>
+                <a:cs typeface="Times New Roman" panose="02020603050405020304" pitchFamily="18" charset="0"/>
+              </a:rPr>
+              <a:t>на ЯП </a:t>
+            </a:r>
+            <a:r>
+              <a:rPr lang="en-US" dirty="0">
+                <a:latin typeface="Times New Roman" panose="02020603050405020304" pitchFamily="18" charset="0"/>
+                <a:cs typeface="Times New Roman" panose="02020603050405020304" pitchFamily="18" charset="0"/>
+              </a:rPr>
+              <a:t>C++</a:t>
+            </a:r>
+            <a:endParaRPr lang="ru-RU" dirty="0">
+              <a:latin typeface="Times New Roman" panose="02020603050405020304" pitchFamily="18" charset="0"/>
+              <a:cs typeface="Times New Roman" panose="02020603050405020304" pitchFamily="18" charset="0"/>
+            </a:endParaRPr>
           </a:p>
         </p:txBody>
       </p:sp>
@@ -8870,7 +9375,7 @@
         </p:blipFill>
         <p:spPr>
           <a:xfrm>
-            <a:off x="1261022" y="3222894"/>
+            <a:off x="1514240" y="3222894"/>
             <a:ext cx="8825087" cy="2710289"/>
           </a:xfrm>
           <a:prstGeom prst="rect">
@@ -8887,7 +9392,7 @@
         <p:spPr>
           <a:xfrm>
             <a:off x="3919855" y="6057151"/>
-            <a:ext cx="4352290" cy="406400"/>
+            <a:ext cx="4534828" cy="406400"/>
           </a:xfrm>
           <a:prstGeom prst="rect">
             <a:avLst/>
@@ -8906,7 +9411,23 @@
                 <a:cs typeface="Times New Roman" panose="02020603050405020304" pitchFamily="18" charset="0"/>
                 <a:sym typeface="+mn-ea"/>
               </a:rPr>
-              <a:t>Рис. 5 – Гистограмма распределения </a:t>
+              <a:t>Рис. 5 – Гистограмма распределения</a:t>
+            </a:r>
+            <a:r>
+              <a:rPr lang="en-US" dirty="0">
+                <a:latin typeface="Times New Roman" panose="02020603050405020304" pitchFamily="18" charset="0"/>
+                <a:cs typeface="Times New Roman" panose="02020603050405020304" pitchFamily="18" charset="0"/>
+                <a:sym typeface="+mn-ea"/>
+              </a:rPr>
+              <a:t> (C++)</a:t>
+            </a:r>
+            <a:r>
+              <a:rPr lang="ru-RU" dirty="0">
+                <a:latin typeface="Times New Roman" panose="02020603050405020304" pitchFamily="18" charset="0"/>
+                <a:cs typeface="Times New Roman" panose="02020603050405020304" pitchFamily="18" charset="0"/>
+                <a:sym typeface="+mn-ea"/>
+              </a:rPr>
+              <a:t> </a:t>
             </a:r>
             <a:endParaRPr lang="ru-RU" altLang="en-US" dirty="0">
               <a:latin typeface="Times New Roman" panose="02020603050405020304" pitchFamily="18" charset="0"/>
@@ -8924,8 +9445,8 @@
         </p:nvSpPr>
         <p:spPr>
           <a:xfrm>
-            <a:off x="4642374" y="2754510"/>
-            <a:ext cx="2023745" cy="406400"/>
+            <a:off x="4217576" y="2760197"/>
+            <a:ext cx="2911977" cy="406400"/>
           </a:xfrm>
           <a:prstGeom prst="rect">
             <a:avLst/>
@@ -8945,6 +9466,14 @@
                 <a:sym typeface="+mn-ea"/>
               </a:rPr>
               <a:t>Рис. 6 – Энтропия </a:t>
+            </a:r>
+            <a:r>
+              <a:rPr lang="en-US" dirty="0">
+                <a:latin typeface="Times New Roman" panose="02020603050405020304" pitchFamily="18" charset="0"/>
+                <a:cs typeface="Times New Roman" panose="02020603050405020304" pitchFamily="18" charset="0"/>
+                <a:sym typeface="+mn-ea"/>
+              </a:rPr>
+              <a:t>(C++)</a:t>
             </a:r>
             <a:endParaRPr lang="ru-RU" altLang="en-US" dirty="0">
               <a:latin typeface="Times New Roman" panose="02020603050405020304" pitchFamily="18" charset="0"/>
@@ -9179,8 +9708,8 @@
         </p:nvSpPr>
         <p:spPr>
           <a:xfrm>
-            <a:off x="1238043" y="6031618"/>
-            <a:ext cx="3603571" cy="369332"/>
+            <a:off x="838200" y="6001871"/>
+            <a:ext cx="4543779" cy="369332"/>
           </a:xfrm>
           <a:prstGeom prst="rect">
             <a:avLst/>
@@ -9200,6 +9729,31 @@
               </a:rPr>
               <a:t>Рис. 7 – Информация о программе</a:t>
             </a:r>
+            <a:r>
+              <a:rPr lang="en-US" dirty="0">
+                <a:latin typeface="Times New Roman" panose="02020603050405020304" pitchFamily="18" charset="0"/>
+                <a:cs typeface="Times New Roman" panose="02020603050405020304" pitchFamily="18" charset="0"/>
+              </a:rPr>
+              <a:t> </a:t>
+            </a:r>
+            <a:r>
+              <a:rPr lang="ru-RU" dirty="0">
+                <a:latin typeface="Times New Roman" panose="02020603050405020304" pitchFamily="18" charset="0"/>
+                <a:cs typeface="Times New Roman" panose="02020603050405020304" pitchFamily="18" charset="0"/>
+              </a:rPr>
+              <a:t>на ЯП </a:t>
+            </a:r>
+            <a:r>
+              <a:rPr lang="en-US" dirty="0">
+                <a:latin typeface="Times New Roman" panose="02020603050405020304" pitchFamily="18" charset="0"/>
+                <a:cs typeface="Times New Roman" panose="02020603050405020304" pitchFamily="18" charset="0"/>
+              </a:rPr>
+              <a:t>C#</a:t>
+            </a:r>
+            <a:endParaRPr lang="ru-RU" dirty="0">
+              <a:latin typeface="Times New Roman" panose="02020603050405020304" pitchFamily="18" charset="0"/>
+              <a:cs typeface="Times New Roman" panose="02020603050405020304" pitchFamily="18" charset="0"/>
+            </a:endParaRPr>
           </a:p>
         </p:txBody>
       </p:sp>
@@ -9347,8 +9901,8 @@
         </p:nvSpPr>
         <p:spPr>
           <a:xfrm>
-            <a:off x="1037622" y="5750004"/>
-            <a:ext cx="3603571" cy="369332"/>
+            <a:off x="694682" y="5750004"/>
+            <a:ext cx="4289452" cy="369332"/>
           </a:xfrm>
           <a:prstGeom prst="rect">
             <a:avLst/>
@@ -9369,6 +9923,17 @@
               </a:rPr>
               <a:t>Рис. 8 – Шестнадцатеричный дамп</a:t>
             </a:r>
+            <a:r>
+              <a:rPr lang="en-US" dirty="0">
+                <a:latin typeface="Times New Roman" panose="02020603050405020304" pitchFamily="18" charset="0"/>
+                <a:cs typeface="Times New Roman" panose="02020603050405020304" pitchFamily="18" charset="0"/>
+              </a:rPr>
+              <a:t> (C#)</a:t>
+            </a:r>
+            <a:endParaRPr lang="ru-RU" dirty="0">
+              <a:latin typeface="Times New Roman" panose="02020603050405020304" pitchFamily="18" charset="0"/>
+              <a:cs typeface="Times New Roman" panose="02020603050405020304" pitchFamily="18" charset="0"/>
+            </a:endParaRPr>
           </a:p>
         </p:txBody>
       </p:sp>
@@ -9380,8 +9945,8 @@
         </p:nvSpPr>
         <p:spPr>
           <a:xfrm>
-            <a:off x="6864926" y="5750004"/>
-            <a:ext cx="4289452" cy="369332"/>
+            <a:off x="6471029" y="5750004"/>
+            <a:ext cx="5205167" cy="369332"/>
           </a:xfrm>
           <a:prstGeom prst="rect">
             <a:avLst/>
@@ -9399,7 +9964,35 @@
                 <a:latin typeface="Times New Roman" panose="02020603050405020304" pitchFamily="18" charset="0"/>
                 <a:cs typeface="Times New Roman" panose="02020603050405020304" pitchFamily="18" charset="0"/>
               </a:rPr>
-              <a:t>Рис. 9 – Дизассемблирование программы </a:t>
+              <a:t>Рис. 9 – Дизассемблирование программы</a:t>
+            </a:r>
+            <a:r>
+              <a:rPr lang="en-US" dirty="0">
+                <a:latin typeface="Times New Roman" panose="02020603050405020304" pitchFamily="18" charset="0"/>
+                <a:cs typeface="Times New Roman" panose="02020603050405020304" pitchFamily="18" charset="0"/>
+              </a:rPr>
+              <a:t> </a:t>
+            </a:r>
+            <a:r>
+              <a:rPr lang="ru-RU" dirty="0">
+                <a:latin typeface="Times New Roman" panose="02020603050405020304" pitchFamily="18" charset="0"/>
+                <a:cs typeface="Times New Roman" panose="02020603050405020304" pitchFamily="18" charset="0"/>
+              </a:rPr>
+              <a:t>на ЯП </a:t>
+            </a:r>
+            <a:r>
+              <a:rPr lang="en-US" dirty="0">
+                <a:latin typeface="Times New Roman" panose="02020603050405020304" pitchFamily="18" charset="0"/>
+                <a:cs typeface="Times New Roman" panose="02020603050405020304" pitchFamily="18" charset="0"/>
+              </a:rPr>
+              <a:t>C#</a:t>
+            </a:r>
+            <a:r>
+              <a:rPr lang="ru-RU" dirty="0">
+                <a:latin typeface="Times New Roman" panose="02020603050405020304" pitchFamily="18" charset="0"/>
+                <a:cs typeface="Times New Roman" panose="02020603050405020304" pitchFamily="18" charset="0"/>
+              </a:rPr>
+              <a:t> </a:t>
             </a:r>
           </a:p>
         </p:txBody>
@@ -9515,7 +10108,7 @@
         <p:spPr>
           <a:xfrm>
             <a:off x="4722179" y="3000357"/>
-            <a:ext cx="2082621" cy="369332"/>
+            <a:ext cx="2559932" cy="369332"/>
           </a:xfrm>
           <a:prstGeom prst="rect">
             <a:avLst/>
@@ -9535,6 +10128,17 @@
               </a:rPr>
               <a:t>Рис. 10 – Энтропия</a:t>
             </a:r>
+            <a:r>
+              <a:rPr lang="en-US" dirty="0">
+                <a:latin typeface="Times New Roman" panose="02020603050405020304" pitchFamily="18" charset="0"/>
+                <a:cs typeface="Times New Roman" panose="02020603050405020304" pitchFamily="18" charset="0"/>
+              </a:rPr>
+              <a:t> (C#)</a:t>
+            </a:r>
+            <a:endParaRPr lang="ru-RU" dirty="0">
+              <a:latin typeface="Times New Roman" panose="02020603050405020304" pitchFamily="18" charset="0"/>
+              <a:cs typeface="Times New Roman" panose="02020603050405020304" pitchFamily="18" charset="0"/>
+            </a:endParaRPr>
           </a:p>
         </p:txBody>
       </p:sp>
@@ -9547,7 +10151,7 @@
         <p:spPr>
           <a:xfrm>
             <a:off x="3821771" y="6277692"/>
-            <a:ext cx="3883435" cy="369332"/>
+            <a:ext cx="4364336" cy="369332"/>
           </a:xfrm>
           <a:prstGeom prst="rect">
             <a:avLst/>
@@ -9567,6 +10171,17 @@
               </a:rPr>
               <a:t>Рис. 11 – Гистограмма распределения</a:t>
             </a:r>
+            <a:r>
+              <a:rPr lang="en-US" dirty="0">
+                <a:latin typeface="Times New Roman" panose="02020603050405020304" pitchFamily="18" charset="0"/>
+                <a:cs typeface="Times New Roman" panose="02020603050405020304" pitchFamily="18" charset="0"/>
+              </a:rPr>
+              <a:t> (C#)</a:t>
+            </a:r>
+            <a:endParaRPr lang="ru-RU" dirty="0">
+              <a:latin typeface="Times New Roman" panose="02020603050405020304" pitchFamily="18" charset="0"/>
+              <a:cs typeface="Times New Roman" panose="02020603050405020304" pitchFamily="18" charset="0"/>
+            </a:endParaRPr>
           </a:p>
         </p:txBody>
       </p:sp>
@@ -9772,8 +10387,8 @@
         </p:nvSpPr>
         <p:spPr>
           <a:xfrm>
-            <a:off x="1659147" y="6011350"/>
-            <a:ext cx="3240101" cy="369332"/>
+            <a:off x="1182691" y="6053548"/>
+            <a:ext cx="4193013" cy="369332"/>
           </a:xfrm>
           <a:prstGeom prst="rect">
             <a:avLst/>
@@ -9807,6 +10422,17 @@
               </a:rPr>
               <a:t>2 – Информация о файле</a:t>
             </a:r>
+            <a:r>
+              <a:rPr lang="en-US" dirty="0">
+                <a:latin typeface="Times New Roman" panose="02020603050405020304" pitchFamily="18" charset="0"/>
+                <a:cs typeface="Times New Roman" panose="02020603050405020304" pitchFamily="18" charset="0"/>
+              </a:rPr>
+              <a:t> (Python)</a:t>
+            </a:r>
+            <a:endParaRPr lang="ru-RU" dirty="0">
+              <a:latin typeface="Times New Roman" panose="02020603050405020304" pitchFamily="18" charset="0"/>
+              <a:cs typeface="Times New Roman" panose="02020603050405020304" pitchFamily="18" charset="0"/>
+            </a:endParaRPr>
           </a:p>
         </p:txBody>
       </p:sp>
